--- a/assets/pptx/catalog-698.pptx
+++ b/assets/pptx/catalog-698.pptx
@@ -3248,7 +3248,7 @@
                 <a:ea typeface="Ebrima"/>
                 <a:cs typeface="Ebrima"/>
               </a:rPr>
-              <a:t>ኦ ማራናታ (2) እላለሁ</a:t>
+              <a:t>ኦ ማራናታ 2 እላለሁ</a:t>
             </a:r>
           </a:p>
           <a:p>
@@ -3266,7 +3266,7 @@
                 <a:ea typeface="Ebrima"/>
                 <a:cs typeface="Ebrima"/>
               </a:rPr>
-              <a:t>ናልኝ (2) ና አሀሀሀ ናፍቄሀለሁ X2</a:t>
+              <a:t>ናልኝ 2 ና አሀሀሀ ናፍቄሀለሁ X2</a:t>
             </a:r>
           </a:p>
         </p:txBody>
@@ -3333,7 +3333,7 @@
                 <a:ea typeface="Ebrima"/>
                 <a:cs typeface="Ebrima"/>
               </a:rPr>
-              <a:t>እሄዳለሁ ሁ ሁ ሁ (2) እሄዳለሁ</a:t>
+              <a:t>እሄዳለሁ ሁ ሁ ሁ 2 እሄዳለሁ</a:t>
             </a:r>
           </a:p>
           <a:p>
@@ -3575,7 +3575,7 @@
                 <a:ea typeface="Ebrima"/>
                 <a:cs typeface="Ebrima"/>
               </a:rPr>
-              <a:t>ኦ ማራናታ (2) እላለሁ</a:t>
+              <a:t>ኦ ማራናታ 2 እላለሁ</a:t>
             </a:r>
           </a:p>
           <a:p>
@@ -3593,7 +3593,7 @@
                 <a:ea typeface="Ebrima"/>
                 <a:cs typeface="Ebrima"/>
               </a:rPr>
-              <a:t>ናልኝ (2) ና አሀሀሀ ናፍቄሀለሁ X2</a:t>
+              <a:t>ናልኝ 2 ና አሀሀሀ ናፍቄሀለሁ X2</a:t>
             </a:r>
           </a:p>
         </p:txBody>
@@ -3660,7 +3660,7 @@
                 <a:ea typeface="Ebrima"/>
                 <a:cs typeface="Ebrima"/>
               </a:rPr>
-              <a:t>እሄዳለሁ ሁ ሁ ሁ (2) እሄዳለሁ</a:t>
+              <a:t>እሄዳለሁ ሁ ሁ ሁ 2 እሄዳለሁ</a:t>
             </a:r>
           </a:p>
           <a:p>
@@ -3799,7 +3799,7 @@
                 <a:ea typeface="Ebrima"/>
                 <a:cs typeface="Ebrima"/>
               </a:rPr>
-              <a:t>የሱ የሆኑትን ሊነጥቅ ጥቂት ነው (2) የቀረው</a:t>
+              <a:t>የሱ የሆኑትን ሊነጥቅ ጥቂት ነው 2 የቀረው</a:t>
             </a:r>
           </a:p>
           <a:p>
@@ -3817,7 +3817,7 @@
                 <a:ea typeface="Ebrima"/>
                 <a:cs typeface="Ebrima"/>
               </a:rPr>
-              <a:t>ጌታ እኮ በቅርብ ይመጣል በደመና ይመለሳል (2)</a:t>
+              <a:t>ጌታ እኮ በቅርብ ይመጣል በደመና ይመለሳል 2</a:t>
             </a:r>
           </a:p>
         </p:txBody>
@@ -3884,7 +3884,7 @@
                 <a:ea typeface="Ebrima"/>
                 <a:cs typeface="Ebrima"/>
               </a:rPr>
-              <a:t>ኦ ማራናታ (2) እላለሁ</a:t>
+              <a:t>ኦ ማራናታ 2 እላለሁ</a:t>
             </a:r>
           </a:p>
           <a:p>
@@ -3902,7 +3902,7 @@
                 <a:ea typeface="Ebrima"/>
                 <a:cs typeface="Ebrima"/>
               </a:rPr>
-              <a:t>ናልኝ (2) ና አሀሀሀ ናፍቄሀለሁ X2</a:t>
+              <a:t>ናልኝ 2 ና አሀሀሀ ናፍቄሀለሁ X2</a:t>
             </a:r>
           </a:p>
         </p:txBody>
@@ -3969,7 +3969,7 @@
                 <a:ea typeface="Ebrima"/>
                 <a:cs typeface="Ebrima"/>
               </a:rPr>
-              <a:t>እሄዳለሁ ሁ ሁ ሁ (2) እሄዳለሁ</a:t>
+              <a:t>እሄዳለሁ ሁ ሁ ሁ 2 እሄዳለሁ</a:t>
             </a:r>
           </a:p>
           <a:p>
